--- a/artifacts/speaking-portfolio-expanded/decks/failure-improvement-30min-screen.pptx
+++ b/artifacts/speaking-portfolio-expanded/decks/failure-improvement-30min-screen.pptx
@@ -337,53 +337,53 @@
                 <a:ea typeface="Arial"/>
                 <a:cs typeface="Arial"/>
               </a:rPr>
-              <a:t xml:space="preserve">This talk owns the offline improvement loop, including the people reviewing its output. The examples are teaching fixtures until I attach a production record. Runtime recovery belongs to Adaptive, agentic apps.</a:t>
-            </a:r>
-            <a:endParaRPr lang="en-US" sz="1200"/>
-          </a:p>
-          <a:p>
-            <a:pPr marL="0" indent="0">
-              <a:lnSpc>
-                <a:spcPts val="1560"/>
-              </a:lnSpc>
-              <a:spcAft>
-                <a:spcPts val="0"/>
-              </a:spcAft>
-              <a:buNone/>
-            </a:pPr>
-            <a:r>
-              <a:rPr lang="en-US" sz="1200" b="0">
-                <a:solidFill>
-                  <a:srgbClr val="202b33"/>
-                </a:solidFill>
-                <a:latin typeface="Arial"/>
-                <a:ea typeface="Arial"/>
-                <a:cs typeface="Arial"/>
-              </a:rPr>
-              <a:t xml:space="preserve"/>
-            </a:r>
-            <a:endParaRPr lang="en-US" sz="1200"/>
-          </a:p>
-          <a:p>
-            <a:pPr marL="0" indent="0">
-              <a:lnSpc>
-                <a:spcPts val="1560"/>
-              </a:lnSpc>
-              <a:spcAft>
-                <a:spcPts val="0"/>
-              </a:spcAft>
-              <a:buNone/>
-            </a:pPr>
-            <a:r>
-              <a:rPr lang="en-US" sz="1200" b="0">
-                <a:solidFill>
-                  <a:srgbClr val="202b33"/>
-                </a:solidFill>
-                <a:latin typeface="Arial"/>
-                <a:ea typeface="Arial"/>
-                <a:cs typeface="Arial"/>
-              </a:rPr>
-              <a:t xml:space="preserve">There is a name for training people to ignore the channel that is supposed to warn them. Alert fatigue. Cvach reviewed it in clinical monitoring. I am borrowing the mechanism, not claiming a hospital study measured your on-call rotation. If our new agent creates a ticket for every log line, we have automated the thing that made the logs unreadable.</a:t>
+              <a:t xml:space="preserve">This talk owns the offline improvement loop, including the people reviewing its output. The examples are teaching fixtures until I attach a production record. Runtime recovery, and how much authority a running agent earns for itself, belongs to Adaptive, agentic apps.</a:t>
+            </a:r>
+            <a:endParaRPr lang="en-US" sz="1200"/>
+          </a:p>
+          <a:p>
+            <a:pPr marL="0" indent="0">
+              <a:lnSpc>
+                <a:spcPts val="1560"/>
+              </a:lnSpc>
+              <a:spcAft>
+                <a:spcPts val="0"/>
+              </a:spcAft>
+              <a:buNone/>
+            </a:pPr>
+            <a:r>
+              <a:rPr lang="en-US" sz="1200" b="0">
+                <a:solidFill>
+                  <a:srgbClr val="202b33"/>
+                </a:solidFill>
+                <a:latin typeface="Arial"/>
+                <a:ea typeface="Arial"/>
+                <a:cs typeface="Arial"/>
+              </a:rPr>
+              <a:t xml:space="preserve"/>
+            </a:r>
+            <a:endParaRPr lang="en-US" sz="1200"/>
+          </a:p>
+          <a:p>
+            <a:pPr marL="0" indent="0">
+              <a:lnSpc>
+                <a:spcPts val="1560"/>
+              </a:lnSpc>
+              <a:spcAft>
+                <a:spcPts val="0"/>
+              </a:spcAft>
+              <a:buNone/>
+            </a:pPr>
+            <a:r>
+              <a:rPr lang="en-US" sz="1200" b="0">
+                <a:solidFill>
+                  <a:srgbClr val="202b33"/>
+                </a:solidFill>
+                <a:latin typeface="Arial"/>
+                <a:ea typeface="Arial"/>
+                <a:cs typeface="Arial"/>
+              </a:rPr>
+              <a:t xml:space="preserve">There is a name for training people to ignore the channel that is supposed to warn them. Alert fatigue. Cvach measured it on hospital monitors. Your pager is the same instrument. If our new agent creates a ticket for every log line, we have automated the thing that made the logs unreadable.</a:t>
             </a:r>
             <a:endParaRPr lang="en-US" sz="1200"/>
           </a:p>
@@ -910,6 +910,52 @@
                 <a:ea typeface="Arial"/>
                 <a:cs typeface="Arial"/>
               </a:rPr>
+              <a:t xml:space="preserve">This is where Adaptive, agentic apps hands work back. A runtime agent earns its own authority there; the compiled procedure it keeps reusing gets evaluated here, offline, like any other change.</a:t>
+            </a:r>
+            <a:endParaRPr lang="en-US" sz="1200"/>
+          </a:p>
+          <a:p>
+            <a:pPr marL="0" indent="0">
+              <a:lnSpc>
+                <a:spcPts val="1560"/>
+              </a:lnSpc>
+              <a:spcAft>
+                <a:spcPts val="0"/>
+              </a:spcAft>
+              <a:buNone/>
+            </a:pPr>
+            <a:r>
+              <a:rPr lang="en-US" sz="1200" b="0">
+                <a:solidFill>
+                  <a:srgbClr val="202b33"/>
+                </a:solidFill>
+                <a:latin typeface="Arial"/>
+                <a:ea typeface="Arial"/>
+                <a:cs typeface="Arial"/>
+              </a:rPr>
+              <a:t xml:space="preserve"/>
+            </a:r>
+            <a:endParaRPr lang="en-US" sz="1200"/>
+          </a:p>
+          <a:p>
+            <a:pPr marL="0" indent="0">
+              <a:lnSpc>
+                <a:spcPts val="1560"/>
+              </a:lnSpc>
+              <a:spcAft>
+                <a:spcPts val="0"/>
+              </a:spcAft>
+              <a:buNone/>
+            </a:pPr>
+            <a:r>
+              <a:rPr lang="en-US" sz="1200" b="0">
+                <a:solidFill>
+                  <a:srgbClr val="202b33"/>
+                </a:solidFill>
+                <a:latin typeface="Arial"/>
+                <a:ea typeface="Arial"/>
+                <a:cs typeface="Arial"/>
+              </a:rPr>
               <a:t xml:space="preserve">Selecting tests from a diff is another candidate. Compare it against the full suite on retained changes before trusting the selection. Count missed regressions as well as runtime. Keep the full suite on a schedule. Cheap selection that skips the failing test has excellent unit economics right up to the incident.</a:t>
             </a:r>
             <a:endParaRPr lang="en-US" sz="1200"/>
@@ -956,7 +1002,7 @@
                 <a:ea typeface="Arial"/>
                 <a:cs typeface="Arial"/>
               </a:rPr>
-              <a:t xml:space="preserve">The repeated agent task you turned into a script. Bring the file and a case where it needed invalidating. Use measured browser-test costs only with run records.</a:t>
+              <a:t xml:space="preserve">The repeated agent task you turned into a script. Bring the file and a case where it needed invalidating.</a:t>
             </a:r>
             <a:endParaRPr lang="en-US" sz="1200"/>
           </a:p>
@@ -3453,7 +3499,7 @@
                 <a:ea typeface="Arial"/>
                 <a:cs typeface="Arial"/>
               </a:rPr>
-              <a:t xml:space="preserve">Replay the opening scroll beside the distilled artifact. End there.</a:t>
+              <a:t xml:space="preserve">Replay the opening scroll beside the distilled artifact. End there. Stop talking.</a:t>
             </a:r>
             <a:endParaRPr lang="en-US" sz="1200"/>
           </a:p>
@@ -4323,7 +4369,7 @@
                 <a:ea typeface="Arial"/>
                 <a:cs typeface="Arial"/>
               </a:rPr>
-              <a:t xml:space="preserve">An agent reading everything writes you a summary of the noise. Pick one failure class. If the class turns out to contain three different mechanisms, split it. That discovery is useful work.</a:t>
+              <a:t xml:space="preserve">The assistant with access to everything is coming anyway, and I am not arguing against it. This loop is one job with a countable tool list. An agent reading everything writes you a summary of the noise. Pick one failure class. If the class turns out to contain three different mechanisms, split it. That discovery is useful work.</a:t>
             </a:r>
             <a:endParaRPr lang="en-US" sz="1200"/>
           </a:p>
@@ -5812,7 +5858,7 @@
                 <a:ea typeface="Arial"/>
                 <a:cs typeface="Arial"/>
               </a:rPr>
-              <a:t xml:space="preserve">Diane Vaughan called the organizational pattern normalization of deviance. Her Challenger analysis shows how repeated acceptance of anomalies made them ordinary. Our application is narrower: a repair loop needs evidence that the defect is gone, because successful workarounds are very persuasive evidence of the wrong thing.</a:t>
+              <a:t xml:space="preserve">Diane Vaughan called the organizational pattern normalization of deviance. Her Challenger analysis shows how repeated acceptance of anomalies made them ordinary. A repair loop needs evidence that the defect is gone. Successful workarounds are very persuasive evidence of the wrong thing.</a:t>
             </a:r>
             <a:endParaRPr lang="en-US" sz="1200"/>
           </a:p>
@@ -7810,7 +7856,7 @@
                 <a:ea typeface="Arial"/>
                 <a:cs typeface="Arial"/>
               </a:rPr>
-              <a:t xml:space="preserve">Your logs are a roadmap nobody reads</a:t>
+              <a:t xml:space="preserve">Nobody reads the scroll</a:t>
             </a:r>
             <a:endParaRPr lang="en-US" sz="3900"/>
           </a:p>
@@ -12916,7 +12962,7 @@
                 <a:ea typeface="Arial"/>
                 <a:cs typeface="Arial"/>
               </a:rPr>
-              <a:t xml:space="preserve">From tags to tickets and PRs</a:t>
+              <a:t xml:space="preserve">Tickets are cheap. Review is not.</a:t>
             </a:r>
             <a:endParaRPr lang="en-US" sz="3900"/>
           </a:p>
